--- a/tcc-documentacao/exemplo Banner.pptx
+++ b/tcc-documentacao/exemplo Banner.pptx
@@ -6773,8 +6773,8 @@
         </p:nvSpPr>
         <p:spPr bwMode="auto">
           <a:xfrm>
-            <a:off x="1223963" y="23226713"/>
-            <a:ext cx="12598400" cy="3963987"/>
+            <a:off x="1223963" y="22886989"/>
+            <a:ext cx="12598400" cy="4303712"/>
           </a:xfrm>
           <a:prstGeom prst="rect">
             <a:avLst/>
@@ -9653,8 +9653,8 @@
         </p:nvSpPr>
         <p:spPr bwMode="auto">
           <a:xfrm>
-            <a:off x="1296988" y="23620413"/>
-            <a:ext cx="12487275" cy="3540125"/>
+            <a:off x="1352550" y="23007638"/>
+            <a:ext cx="12487275" cy="5016758"/>
           </a:xfrm>
           <a:prstGeom prst="rect">
             <a:avLst/>
@@ -9690,90 +9690,38 @@
           <a:lstStyle/>
           <a:p>
             <a:r>
-              <a:rPr lang="pt-BR" altLang="pt-BR"/>
-              <a:t>- Através da plataforma promover o acesso à cultura de qualidade aos jovens.</a:t>
+              <a:rPr lang="pt-BR" altLang="pt-BR" dirty="0"/>
+              <a:t>-</a:t>
             </a:r>
-          </a:p>
-          <a:p>
             <a:r>
-              <a:rPr lang="pt-BR" altLang="pt-BR"/>
-              <a:t>-Permitir que empresas de entretenimento possam se cadastrar e  anunciar seus eventos.</a:t>
+              <a:rPr lang="pt-BR" dirty="0"/>
+              <a:t>Informar os canais de comunicação e os órgãos competentes para a população poder realizar suas denúncias.</a:t>
             </a:r>
           </a:p>
           <a:p>
             <a:r>
-              <a:rPr lang="pt-BR" altLang="pt-BR"/>
-              <a:t> -Promover diversão através da plataforma</a:t>
+              <a:rPr lang="pt-BR" altLang="pt-BR" dirty="0"/>
+              <a:t>-</a:t>
             </a:r>
-          </a:p>
-          <a:p>
             <a:r>
-              <a:rPr lang="pt-BR" altLang="pt-BR"/>
-              <a:t>- Desenvolver um site com características de agilidade , conforto e praticidade ao usuário.</a:t>
+              <a:rPr lang="pt-BR" dirty="0"/>
+              <a:t>Permitir a população acompanhar o estado da solicitação (a solicitação para os órgãos responsáveis, a resposta do órgão responsável, e todo o processo até a resolução do problema identificado pela população).</a:t>
             </a:r>
+          </a:p>
+          <a:p>
+            <a:r>
+              <a:rPr lang="pt-BR" dirty="0"/>
+              <a:t>-Permitir a resposta do órgão competente sobre o processo da resolução do problema.</a:t>
+            </a:r>
+          </a:p>
+          <a:p>
+            <a:endParaRPr lang="pt-BR" dirty="0"/>
+          </a:p>
+          <a:p>
+            <a:endParaRPr lang="pt-BR" altLang="pt-BR" dirty="0"/>
           </a:p>
         </p:txBody>
       </p:sp>
-      <p:pic>
-        <p:nvPicPr>
-          <p:cNvPr id="2076" name="Imagem 5">
-            <a:extLst>
-              <a:ext uri="{FF2B5EF4-FFF2-40B4-BE49-F238E27FC236}">
-                <a16:creationId xmlns:a16="http://schemas.microsoft.com/office/drawing/2014/main" id="{496B4119-17FA-8FEE-531A-37CCFC1C7F03}"/>
-              </a:ext>
-            </a:extLst>
-          </p:cNvPr>
-          <p:cNvPicPr>
-            <a:picLocks noChangeAspect="1"/>
-          </p:cNvPicPr>
-          <p:nvPr/>
-        </p:nvPicPr>
-        <p:blipFill>
-          <a:blip r:embed="rId4">
-            <a:extLst>
-              <a:ext uri="{28A0092B-C50C-407E-A947-70E740481C1C}">
-                <a14:useLocalDpi xmlns:a14="http://schemas.microsoft.com/office/drawing/2010/main" val="0"/>
-              </a:ext>
-            </a:extLst>
-          </a:blip>
-          <a:srcRect/>
-          <a:stretch>
-            <a:fillRect/>
-          </a:stretch>
-        </p:blipFill>
-        <p:spPr bwMode="auto">
-          <a:xfrm>
-            <a:off x="1511300" y="29259213"/>
-            <a:ext cx="12239625" cy="5775325"/>
-          </a:xfrm>
-          <a:prstGeom prst="rect">
-            <a:avLst/>
-          </a:prstGeom>
-          <a:noFill/>
-          <a:ln>
-            <a:noFill/>
-          </a:ln>
-          <a:extLst>
-            <a:ext uri="{909E8E84-426E-40DD-AFC4-6F175D3DCCD1}">
-              <a14:hiddenFill xmlns:a14="http://schemas.microsoft.com/office/drawing/2010/main">
-                <a:solidFill>
-                  <a:srgbClr val="FFFFFF"/>
-                </a:solidFill>
-              </a14:hiddenFill>
-            </a:ext>
-            <a:ext uri="{91240B29-F687-4F45-9708-019B960494DF}">
-              <a14:hiddenLine xmlns:a14="http://schemas.microsoft.com/office/drawing/2010/main" w="9525">
-                <a:solidFill>
-                  <a:srgbClr val="000000"/>
-                </a:solidFill>
-                <a:miter lim="800000"/>
-                <a:headEnd/>
-                <a:tailEnd/>
-              </a14:hiddenLine>
-            </a:ext>
-          </a:extLst>
-        </p:spPr>
-      </p:pic>
       <p:sp>
         <p:nvSpPr>
           <p:cNvPr id="2077" name="CaixaDeTexto 6">
@@ -9790,8 +9738,8 @@
         </p:nvSpPr>
         <p:spPr bwMode="auto">
           <a:xfrm>
-            <a:off x="1798638" y="35282188"/>
-            <a:ext cx="11880850" cy="2062162"/>
+            <a:off x="1941513" y="35710208"/>
+            <a:ext cx="11880850" cy="1569660"/>
           </a:xfrm>
           <a:prstGeom prst="rect">
             <a:avLst/>
@@ -9827,8 +9775,8 @@
           <a:lstStyle/>
           <a:p>
             <a:r>
-              <a:rPr lang="pt-BR" altLang="pt-BR"/>
-              <a:t>Fizemos uma pesquisa de campo onde 48,3% das pessoas acabaram ficando em casa por não terem aonde ir. Essa pesquisa reforçou nossa ideia, que por sua vez,  condiz exatamente com a nossa proposta para o projeto.</a:t>
+              <a:rPr lang="pt-BR" altLang="pt-BR" dirty="0"/>
+              <a:t>Fizemos uma pesquisa de campo onde 98% das pessoas acabaram relatando a existência deste tipo de problema o que reforça a necessidade do nosso aplicativo</a:t>
             </a:r>
           </a:p>
         </p:txBody>
@@ -9849,8 +9797,8 @@
         </p:nvSpPr>
         <p:spPr bwMode="auto">
           <a:xfrm>
-            <a:off x="15443200" y="26797000"/>
-            <a:ext cx="11522075" cy="2554288"/>
+            <a:off x="15443200" y="26895137"/>
+            <a:ext cx="11522075" cy="3046988"/>
           </a:xfrm>
           <a:prstGeom prst="rect">
             <a:avLst/>
@@ -9886,72 +9834,12 @@
           <a:lstStyle/>
           <a:p>
             <a:r>
-              <a:rPr lang="pt-BR" altLang="pt-BR"/>
-              <a:t>O mercado de entretenimento têm crescido muito ao longo dos últimos anos. Nosso projeto tem como objetivo oferecer uma plataforma com o foco em simplicidade e objetividade buscando ajudar qualquer um à decidir pra onde ir ou o que fazer na hora do tédio.</a:t>
+              <a:rPr lang="pt-BR" altLang="pt-BR" dirty="0"/>
+              <a:t>Com muitos problemas recorrentes nas grandes cidades só resta uma opção, criar um sistema que permite a população denunciar problemas urbanos, de forma a registrar a localização do problema, a data da denúncia e exibir o status das denúncias, permitindo uma melhor comunicação entre cidadão e estado.</a:t>
             </a:r>
           </a:p>
         </p:txBody>
       </p:sp>
-      <p:pic>
-        <p:nvPicPr>
-          <p:cNvPr id="2079" name="Imagem 3">
-            <a:extLst>
-              <a:ext uri="{FF2B5EF4-FFF2-40B4-BE49-F238E27FC236}">
-                <a16:creationId xmlns:a16="http://schemas.microsoft.com/office/drawing/2014/main" id="{09CCAB97-CA9B-61F3-29B0-D4F569F0D063}"/>
-              </a:ext>
-            </a:extLst>
-          </p:cNvPr>
-          <p:cNvPicPr>
-            <a:picLocks noChangeAspect="1"/>
-          </p:cNvPicPr>
-          <p:nvPr/>
-        </p:nvPicPr>
-        <p:blipFill>
-          <a:blip r:embed="rId5">
-            <a:extLst>
-              <a:ext uri="{28A0092B-C50C-407E-A947-70E740481C1C}">
-                <a14:useLocalDpi xmlns:a14="http://schemas.microsoft.com/office/drawing/2010/main" val="0"/>
-              </a:ext>
-            </a:extLst>
-          </a:blip>
-          <a:srcRect/>
-          <a:stretch>
-            <a:fillRect/>
-          </a:stretch>
-        </p:blipFill>
-        <p:spPr bwMode="auto">
-          <a:xfrm>
-            <a:off x="15725775" y="9874250"/>
-            <a:ext cx="11099800" cy="5567363"/>
-          </a:xfrm>
-          <a:prstGeom prst="rect">
-            <a:avLst/>
-          </a:prstGeom>
-          <a:noFill/>
-          <a:ln>
-            <a:noFill/>
-          </a:ln>
-          <a:extLst>
-            <a:ext uri="{909E8E84-426E-40DD-AFC4-6F175D3DCCD1}">
-              <a14:hiddenFill xmlns:a14="http://schemas.microsoft.com/office/drawing/2010/main">
-                <a:solidFill>
-                  <a:srgbClr val="FFFFFF"/>
-                </a:solidFill>
-              </a14:hiddenFill>
-            </a:ext>
-            <a:ext uri="{91240B29-F687-4F45-9708-019B960494DF}">
-              <a14:hiddenLine xmlns:a14="http://schemas.microsoft.com/office/drawing/2010/main" w="9525">
-                <a:solidFill>
-                  <a:srgbClr val="000000"/>
-                </a:solidFill>
-                <a:miter lim="800000"/>
-                <a:headEnd/>
-                <a:tailEnd/>
-              </a14:hiddenLine>
-            </a:ext>
-          </a:extLst>
-        </p:spPr>
-      </p:pic>
       <p:sp>
         <p:nvSpPr>
           <p:cNvPr id="2080" name="CaixaDeTexto 6">
@@ -10064,72 +9952,12 @@
           <a:lstStyle/>
           <a:p>
             <a:r>
-              <a:rPr lang="pt-BR" altLang="pt-BR" b="1"/>
-              <a:t>TELA EVENTOS</a:t>
+              <a:rPr lang="pt-BR" altLang="pt-BR" b="1" dirty="0"/>
+              <a:t>TELA CADASTRO</a:t>
             </a:r>
           </a:p>
         </p:txBody>
       </p:sp>
-      <p:pic>
-        <p:nvPicPr>
-          <p:cNvPr id="2082" name="Imagem 10">
-            <a:extLst>
-              <a:ext uri="{FF2B5EF4-FFF2-40B4-BE49-F238E27FC236}">
-                <a16:creationId xmlns:a16="http://schemas.microsoft.com/office/drawing/2014/main" id="{97CB09D2-2927-C226-5ACA-47BA0C08F4D1}"/>
-              </a:ext>
-            </a:extLst>
-          </p:cNvPr>
-          <p:cNvPicPr>
-            <a:picLocks noChangeAspect="1"/>
-          </p:cNvPicPr>
-          <p:nvPr/>
-        </p:nvPicPr>
-        <p:blipFill>
-          <a:blip r:embed="rId6">
-            <a:extLst>
-              <a:ext uri="{28A0092B-C50C-407E-A947-70E740481C1C}">
-                <a14:useLocalDpi xmlns:a14="http://schemas.microsoft.com/office/drawing/2010/main" val="0"/>
-              </a:ext>
-            </a:extLst>
-          </a:blip>
-          <a:srcRect/>
-          <a:stretch>
-            <a:fillRect/>
-          </a:stretch>
-        </p:blipFill>
-        <p:spPr bwMode="auto">
-          <a:xfrm>
-            <a:off x="15725775" y="17241838"/>
-            <a:ext cx="11099800" cy="6153150"/>
-          </a:xfrm>
-          <a:prstGeom prst="rect">
-            <a:avLst/>
-          </a:prstGeom>
-          <a:noFill/>
-          <a:ln>
-            <a:noFill/>
-          </a:ln>
-          <a:extLst>
-            <a:ext uri="{909E8E84-426E-40DD-AFC4-6F175D3DCCD1}">
-              <a14:hiddenFill xmlns:a14="http://schemas.microsoft.com/office/drawing/2010/main">
-                <a:solidFill>
-                  <a:srgbClr val="FFFFFF"/>
-                </a:solidFill>
-              </a14:hiddenFill>
-            </a:ext>
-            <a:ext uri="{91240B29-F687-4F45-9708-019B960494DF}">
-              <a14:hiddenLine xmlns:a14="http://schemas.microsoft.com/office/drawing/2010/main" w="9525">
-                <a:solidFill>
-                  <a:srgbClr val="000000"/>
-                </a:solidFill>
-                <a:miter lim="800000"/>
-                <a:headEnd/>
-                <a:tailEnd/>
-              </a14:hiddenLine>
-            </a:ext>
-          </a:extLst>
-        </p:spPr>
-      </p:pic>
       <p:sp>
         <p:nvSpPr>
           <p:cNvPr id="2083" name="CaixaDeTexto 11">
@@ -10147,7 +9975,7 @@
         <p:spPr bwMode="auto">
           <a:xfrm>
             <a:off x="15443200" y="34269363"/>
-            <a:ext cx="9080500" cy="4030662"/>
+            <a:ext cx="9080500" cy="2554545"/>
           </a:xfrm>
           <a:prstGeom prst="rect">
             <a:avLst/>
@@ -10192,17 +10020,8 @@
           </a:p>
           <a:p>
             <a:r>
-              <a:rPr lang="pt-BR" altLang="pt-BR" dirty="0">
-                <a:hlinkClick r:id="rId7"/>
-              </a:rPr>
-              <a:t>-https://www.pwc.com.br/pt/sala-de-imprensa/noticias/pwc-mercado-global-midia-entretenimento-movimentar-17.html</a:t>
-            </a:r>
-            <a:endParaRPr lang="pt-BR" altLang="pt-BR" dirty="0"/>
-          </a:p>
-          <a:p>
-            <a:r>
               <a:rPr lang="pt-BR" altLang="pt-BR" dirty="0"/>
-              <a:t>-www.sympla.com.br</a:t>
+              <a:t>https://www.reclameaqui.com.br/</a:t>
             </a:r>
           </a:p>
           <a:p>
@@ -10264,7 +10083,7 @@
           <a:p>
             <a:r>
               <a:rPr lang="pt-BR" altLang="pt-BR" b="1" dirty="0"/>
-              <a:t>Protótipo Mapa de eventos</a:t>
+              <a:t>Protótipo Mural de denúncias</a:t>
             </a:r>
           </a:p>
         </p:txBody>
@@ -10284,7 +10103,7 @@
           <p:nvPr/>
         </p:nvPicPr>
         <p:blipFill>
-          <a:blip r:embed="rId8">
+          <a:blip r:embed="rId4">
             <a:extLst>
               <a:ext uri="{28A0092B-C50C-407E-A947-70E740481C1C}">
                 <a14:useLocalDpi xmlns:a14="http://schemas.microsoft.com/office/drawing/2010/main" val="0"/>
@@ -10344,7 +10163,7 @@
           <p:nvPr/>
         </p:nvPicPr>
         <p:blipFill>
-          <a:blip r:embed="rId9">
+          <a:blip r:embed="rId5">
             <a:extLst>
               <a:ext uri="{28A0092B-C50C-407E-A947-70E740481C1C}">
                 <a14:useLocalDpi xmlns:a14="http://schemas.microsoft.com/office/drawing/2010/main" val="0"/>
@@ -10359,6 +10178,114 @@
           <a:xfrm>
             <a:off x="3182215" y="16210441"/>
             <a:ext cx="8396143" cy="4693228"/>
+          </a:xfrm>
+          <a:prstGeom prst="rect">
+            <a:avLst/>
+          </a:prstGeom>
+        </p:spPr>
+      </p:pic>
+      <p:pic>
+        <p:nvPicPr>
+          <p:cNvPr id="9" name="Imagem 8">
+            <a:extLst>
+              <a:ext uri="{FF2B5EF4-FFF2-40B4-BE49-F238E27FC236}">
+                <a16:creationId xmlns:a16="http://schemas.microsoft.com/office/drawing/2014/main" id="{C37FA5EE-2658-43BE-BB4F-4373120C780D}"/>
+              </a:ext>
+            </a:extLst>
+          </p:cNvPr>
+          <p:cNvPicPr>
+            <a:picLocks noChangeAspect="1"/>
+          </p:cNvPicPr>
+          <p:nvPr/>
+        </p:nvPicPr>
+        <p:blipFill>
+          <a:blip r:embed="rId6">
+            <a:extLst>
+              <a:ext uri="{28A0092B-C50C-407E-A947-70E740481C1C}">
+                <a14:useLocalDpi xmlns:a14="http://schemas.microsoft.com/office/drawing/2010/main" val="0"/>
+              </a:ext>
+            </a:extLst>
+          </a:blip>
+          <a:stretch>
+            <a:fillRect/>
+          </a:stretch>
+        </p:blipFill>
+        <p:spPr>
+          <a:xfrm>
+            <a:off x="3599012" y="29230958"/>
+            <a:ext cx="9015772" cy="5563579"/>
+          </a:xfrm>
+          <a:prstGeom prst="rect">
+            <a:avLst/>
+          </a:prstGeom>
+        </p:spPr>
+      </p:pic>
+      <p:pic>
+        <p:nvPicPr>
+          <p:cNvPr id="11" name="Imagem 10">
+            <a:extLst>
+              <a:ext uri="{FF2B5EF4-FFF2-40B4-BE49-F238E27FC236}">
+                <a16:creationId xmlns:a16="http://schemas.microsoft.com/office/drawing/2014/main" id="{7DFFBC64-B667-4155-BBFA-EBD315452807}"/>
+              </a:ext>
+            </a:extLst>
+          </p:cNvPr>
+          <p:cNvPicPr>
+            <a:picLocks noChangeAspect="1"/>
+          </p:cNvPicPr>
+          <p:nvPr/>
+        </p:nvPicPr>
+        <p:blipFill>
+          <a:blip r:embed="rId7">
+            <a:extLst>
+              <a:ext uri="{28A0092B-C50C-407E-A947-70E740481C1C}">
+                <a14:useLocalDpi xmlns:a14="http://schemas.microsoft.com/office/drawing/2010/main" val="0"/>
+              </a:ext>
+            </a:extLst>
+          </a:blip>
+          <a:stretch>
+            <a:fillRect/>
+          </a:stretch>
+        </p:blipFill>
+        <p:spPr>
+          <a:xfrm>
+            <a:off x="16355090" y="9625107"/>
+            <a:ext cx="9841170" cy="6168930"/>
+          </a:xfrm>
+          <a:prstGeom prst="rect">
+            <a:avLst/>
+          </a:prstGeom>
+        </p:spPr>
+      </p:pic>
+      <p:pic>
+        <p:nvPicPr>
+          <p:cNvPr id="13" name="Imagem 12">
+            <a:extLst>
+              <a:ext uri="{FF2B5EF4-FFF2-40B4-BE49-F238E27FC236}">
+                <a16:creationId xmlns:a16="http://schemas.microsoft.com/office/drawing/2014/main" id="{A116AD21-144F-4364-B02F-F29AC040C084}"/>
+              </a:ext>
+            </a:extLst>
+          </p:cNvPr>
+          <p:cNvPicPr>
+            <a:picLocks noChangeAspect="1"/>
+          </p:cNvPicPr>
+          <p:nvPr/>
+        </p:nvPicPr>
+        <p:blipFill>
+          <a:blip r:embed="rId8">
+            <a:extLst>
+              <a:ext uri="{28A0092B-C50C-407E-A947-70E740481C1C}">
+                <a14:useLocalDpi xmlns:a14="http://schemas.microsoft.com/office/drawing/2010/main" val="0"/>
+              </a:ext>
+            </a:extLst>
+          </a:blip>
+          <a:stretch>
+            <a:fillRect/>
+          </a:stretch>
+        </p:blipFill>
+        <p:spPr>
+          <a:xfrm>
+            <a:off x="15744825" y="17904146"/>
+            <a:ext cx="10365496" cy="4642163"/>
           </a:xfrm>
           <a:prstGeom prst="rect">
             <a:avLst/>

--- a/tcc-documentacao/exemplo Banner.pptx
+++ b/tcc-documentacao/exemplo Banner.pptx
@@ -348,7 +348,7 @@
               <a:pPr>
                 <a:defRPr/>
               </a:pPr>
-              <a:t>17/09/2026</a:t>
+              <a:t>18/09/2026</a:t>
             </a:fld>
             <a:endParaRPr lang="pt-BR"/>
           </a:p>
@@ -556,7 +556,7 @@
               <a:pPr>
                 <a:defRPr/>
               </a:pPr>
-              <a:t>17/09/2026</a:t>
+              <a:t>18/09/2026</a:t>
             </a:fld>
             <a:endParaRPr lang="pt-BR"/>
           </a:p>
@@ -774,7 +774,7 @@
               <a:pPr>
                 <a:defRPr/>
               </a:pPr>
-              <a:t>17/09/2026</a:t>
+              <a:t>18/09/2026</a:t>
             </a:fld>
             <a:endParaRPr lang="pt-BR"/>
           </a:p>
@@ -982,7 +982,7 @@
               <a:pPr>
                 <a:defRPr/>
               </a:pPr>
-              <a:t>17/09/2026</a:t>
+              <a:t>18/09/2026</a:t>
             </a:fld>
             <a:endParaRPr lang="pt-BR"/>
           </a:p>
@@ -1267,7 +1267,7 @@
               <a:pPr>
                 <a:defRPr/>
               </a:pPr>
-              <a:t>17/09/2026</a:t>
+              <a:t>18/09/2026</a:t>
             </a:fld>
             <a:endParaRPr lang="pt-BR"/>
           </a:p>
@@ -1592,7 +1592,7 @@
               <a:pPr>
                 <a:defRPr/>
               </a:pPr>
-              <a:t>17/09/2026</a:t>
+              <a:t>18/09/2026</a:t>
             </a:fld>
             <a:endParaRPr lang="pt-BR"/>
           </a:p>
@@ -2051,7 +2051,7 @@
               <a:pPr>
                 <a:defRPr/>
               </a:pPr>
-              <a:t>17/09/2026</a:t>
+              <a:t>18/09/2026</a:t>
             </a:fld>
             <a:endParaRPr lang="pt-BR"/>
           </a:p>
@@ -2208,7 +2208,7 @@
               <a:pPr>
                 <a:defRPr/>
               </a:pPr>
-              <a:t>17/09/2026</a:t>
+              <a:t>18/09/2026</a:t>
             </a:fld>
             <a:endParaRPr lang="pt-BR"/>
           </a:p>
@@ -2343,7 +2343,7 @@
               <a:pPr>
                 <a:defRPr/>
               </a:pPr>
-              <a:t>17/09/2026</a:t>
+              <a:t>18/09/2026</a:t>
             </a:fld>
             <a:endParaRPr lang="pt-BR"/>
           </a:p>
@@ -2658,7 +2658,7 @@
               <a:pPr>
                 <a:defRPr/>
               </a:pPr>
-              <a:t>17/09/2026</a:t>
+              <a:t>18/09/2026</a:t>
             </a:fld>
             <a:endParaRPr lang="pt-BR"/>
           </a:p>
@@ -2953,7 +2953,7 @@
               <a:pPr>
                 <a:defRPr/>
               </a:pPr>
-              <a:t>17/09/2026</a:t>
+              <a:t>18/09/2026</a:t>
             </a:fld>
             <a:endParaRPr lang="pt-BR"/>
           </a:p>
@@ -3273,7 +3273,7 @@
               <a:pPr>
                 <a:defRPr/>
               </a:pPr>
-              <a:t>17/09/2026</a:t>
+              <a:t>18/09/2026</a:t>
             </a:fld>
             <a:endParaRPr lang="pt-BR"/>
           </a:p>
